--- a/a/CFE timeline.pptx
+++ b/a/CFE timeline.pptx
@@ -3196,6 +3196,495 @@
           </a:p>
         </p:txBody>
       </p:sp>
+      <p:sp>
+        <p:nvSpPr>
+          <p:cNvPr id="6" name="Прямоугольник 5"/>
+          <p:cNvSpPr/>
+          <p:nvPr/>
+        </p:nvSpPr>
+        <p:spPr>
+          <a:xfrm>
+            <a:off x="304799" y="8610600"/>
+            <a:ext cx="601447" cy="338554"/>
+          </a:xfrm>
+          <a:prstGeom prst="rect">
+            <a:avLst/>
+          </a:prstGeom>
+        </p:spPr>
+        <p:txBody>
+          <a:bodyPr wrap="none">
+            <a:spAutoFit/>
+          </a:bodyPr>
+          <a:lstStyle/>
+          <a:p>
+            <a:r>
+              <a:rPr lang="ru-RU" sz="1600" b="1" dirty="0" smtClean="0"/>
+              <a:t>200</a:t>
+            </a:r>
+            <a:r>
+              <a:rPr lang="en-US" sz="1600" b="1" dirty="0"/>
+              <a:t>6</a:t>
+            </a:r>
+            <a:endParaRPr lang="ru-RU" dirty="0"/>
+          </a:p>
+        </p:txBody>
+      </p:sp>
+      <p:sp>
+        <p:nvSpPr>
+          <p:cNvPr id="7" name="Прямоугольник 6"/>
+          <p:cNvSpPr/>
+          <p:nvPr/>
+        </p:nvSpPr>
+        <p:spPr>
+          <a:xfrm>
+            <a:off x="249921" y="7772400"/>
+            <a:ext cx="601447" cy="338554"/>
+          </a:xfrm>
+          <a:prstGeom prst="rect">
+            <a:avLst/>
+          </a:prstGeom>
+        </p:spPr>
+        <p:txBody>
+          <a:bodyPr wrap="none">
+            <a:spAutoFit/>
+          </a:bodyPr>
+          <a:lstStyle/>
+          <a:p>
+            <a:r>
+              <a:rPr lang="ru-RU" sz="1600" b="1" dirty="0" smtClean="0"/>
+              <a:t>200</a:t>
+            </a:r>
+            <a:r>
+              <a:rPr lang="en-US" sz="1600" b="1" dirty="0" smtClean="0"/>
+              <a:t>8</a:t>
+            </a:r>
+            <a:endParaRPr lang="ru-RU" dirty="0"/>
+          </a:p>
+        </p:txBody>
+      </p:sp>
+      <p:sp>
+        <p:nvSpPr>
+          <p:cNvPr id="8" name="Прямоугольник 7"/>
+          <p:cNvSpPr/>
+          <p:nvPr/>
+        </p:nvSpPr>
+        <p:spPr>
+          <a:xfrm>
+            <a:off x="270932" y="6781800"/>
+            <a:ext cx="601447" cy="338554"/>
+          </a:xfrm>
+          <a:prstGeom prst="rect">
+            <a:avLst/>
+          </a:prstGeom>
+        </p:spPr>
+        <p:txBody>
+          <a:bodyPr wrap="none">
+            <a:spAutoFit/>
+          </a:bodyPr>
+          <a:lstStyle/>
+          <a:p>
+            <a:r>
+              <a:rPr lang="ru-RU" sz="1600" b="1" dirty="0" smtClean="0"/>
+              <a:t>20</a:t>
+            </a:r>
+            <a:r>
+              <a:rPr lang="en-US" sz="1600" b="1" dirty="0" smtClean="0"/>
+              <a:t>13</a:t>
+            </a:r>
+            <a:endParaRPr lang="ru-RU" dirty="0"/>
+          </a:p>
+        </p:txBody>
+      </p:sp>
+      <p:sp>
+        <p:nvSpPr>
+          <p:cNvPr id="9" name="Прямоугольник 8"/>
+          <p:cNvSpPr/>
+          <p:nvPr/>
+        </p:nvSpPr>
+        <p:spPr>
+          <a:xfrm>
+            <a:off x="260193" y="5638800"/>
+            <a:ext cx="601447" cy="338554"/>
+          </a:xfrm>
+          <a:prstGeom prst="rect">
+            <a:avLst/>
+          </a:prstGeom>
+        </p:spPr>
+        <p:txBody>
+          <a:bodyPr wrap="none">
+            <a:spAutoFit/>
+          </a:bodyPr>
+          <a:lstStyle/>
+          <a:p>
+            <a:r>
+              <a:rPr lang="ru-RU" sz="1600" b="1" dirty="0" smtClean="0"/>
+              <a:t>20</a:t>
+            </a:r>
+            <a:r>
+              <a:rPr lang="en-US" sz="1600" b="1" dirty="0" smtClean="0"/>
+              <a:t>14</a:t>
+            </a:r>
+            <a:endParaRPr lang="ru-RU" dirty="0"/>
+          </a:p>
+        </p:txBody>
+      </p:sp>
+      <p:sp>
+        <p:nvSpPr>
+          <p:cNvPr id="10" name="Прямоугольник 9"/>
+          <p:cNvSpPr/>
+          <p:nvPr/>
+        </p:nvSpPr>
+        <p:spPr>
+          <a:xfrm>
+            <a:off x="249920" y="4579785"/>
+            <a:ext cx="601447" cy="338554"/>
+          </a:xfrm>
+          <a:prstGeom prst="rect">
+            <a:avLst/>
+          </a:prstGeom>
+        </p:spPr>
+        <p:txBody>
+          <a:bodyPr wrap="none">
+            <a:spAutoFit/>
+          </a:bodyPr>
+          <a:lstStyle/>
+          <a:p>
+            <a:r>
+              <a:rPr lang="ru-RU" sz="1600" b="1" dirty="0" smtClean="0"/>
+              <a:t>20</a:t>
+            </a:r>
+            <a:r>
+              <a:rPr lang="en-US" sz="1600" b="1" dirty="0" smtClean="0"/>
+              <a:t>16</a:t>
+            </a:r>
+            <a:endParaRPr lang="ru-RU" dirty="0"/>
+          </a:p>
+        </p:txBody>
+      </p:sp>
+      <p:sp>
+        <p:nvSpPr>
+          <p:cNvPr id="11" name="Прямоугольник 10"/>
+          <p:cNvSpPr/>
+          <p:nvPr/>
+        </p:nvSpPr>
+        <p:spPr>
+          <a:xfrm>
+            <a:off x="226326" y="3581400"/>
+            <a:ext cx="601447" cy="338554"/>
+          </a:xfrm>
+          <a:prstGeom prst="rect">
+            <a:avLst/>
+          </a:prstGeom>
+        </p:spPr>
+        <p:txBody>
+          <a:bodyPr wrap="none">
+            <a:spAutoFit/>
+          </a:bodyPr>
+          <a:lstStyle/>
+          <a:p>
+            <a:r>
+              <a:rPr lang="ru-RU" sz="1600" b="1" dirty="0" smtClean="0"/>
+              <a:t>20</a:t>
+            </a:r>
+            <a:r>
+              <a:rPr lang="en-US" sz="1600" b="1" dirty="0" smtClean="0"/>
+              <a:t>17</a:t>
+            </a:r>
+            <a:endParaRPr lang="ru-RU" dirty="0"/>
+          </a:p>
+        </p:txBody>
+      </p:sp>
+      <p:sp>
+        <p:nvSpPr>
+          <p:cNvPr id="12" name="Прямоугольник 11"/>
+          <p:cNvSpPr/>
+          <p:nvPr/>
+        </p:nvSpPr>
+        <p:spPr>
+          <a:xfrm>
+            <a:off x="245842" y="2590800"/>
+            <a:ext cx="601447" cy="338554"/>
+          </a:xfrm>
+          <a:prstGeom prst="rect">
+            <a:avLst/>
+          </a:prstGeom>
+        </p:spPr>
+        <p:txBody>
+          <a:bodyPr wrap="none">
+            <a:spAutoFit/>
+          </a:bodyPr>
+          <a:lstStyle/>
+          <a:p>
+            <a:r>
+              <a:rPr lang="ru-RU" sz="1600" b="1" dirty="0" smtClean="0"/>
+              <a:t>20</a:t>
+            </a:r>
+            <a:r>
+              <a:rPr lang="en-US" sz="1600" b="1" dirty="0" smtClean="0"/>
+              <a:t>18</a:t>
+            </a:r>
+            <a:endParaRPr lang="ru-RU" dirty="0"/>
+          </a:p>
+        </p:txBody>
+      </p:sp>
+      <p:sp>
+        <p:nvSpPr>
+          <p:cNvPr id="13" name="Прямоугольник 12"/>
+          <p:cNvSpPr/>
+          <p:nvPr/>
+        </p:nvSpPr>
+        <p:spPr>
+          <a:xfrm>
+            <a:off x="304799" y="1676400"/>
+            <a:ext cx="601447" cy="338554"/>
+          </a:xfrm>
+          <a:prstGeom prst="rect">
+            <a:avLst/>
+          </a:prstGeom>
+        </p:spPr>
+        <p:txBody>
+          <a:bodyPr wrap="none">
+            <a:spAutoFit/>
+          </a:bodyPr>
+          <a:lstStyle/>
+          <a:p>
+            <a:r>
+              <a:rPr lang="ru-RU" sz="1600" b="1" dirty="0" smtClean="0"/>
+              <a:t>200</a:t>
+            </a:r>
+            <a:r>
+              <a:rPr lang="en-US" sz="1600" b="1" dirty="0" smtClean="0"/>
+              <a:t>6</a:t>
+            </a:r>
+            <a:endParaRPr lang="ru-RU" dirty="0"/>
+          </a:p>
+        </p:txBody>
+      </p:sp>
+      <p:pic>
+        <p:nvPicPr>
+          <p:cNvPr id="14" name="Picture 2" descr="C:\!DISK\116 WEBSITES AND DOMAINS\cfeglobal.org\images\gen_circle.png"/>
+          <p:cNvPicPr>
+            <a:picLocks noChangeAspect="1" noChangeArrowheads="1"/>
+          </p:cNvPicPr>
+          <p:nvPr/>
+        </p:nvPicPr>
+        <p:blipFill>
+          <a:blip r:embed="rId3" cstate="print">
+            <a:extLst>
+              <a:ext uri="{28A0092B-C50C-407E-A947-70E740481C1C}">
+                <a14:useLocalDpi xmlns:a14="http://schemas.microsoft.com/office/drawing/2010/main" val="0"/>
+              </a:ext>
+            </a:extLst>
+          </a:blip>
+          <a:srcRect/>
+          <a:stretch>
+            <a:fillRect/>
+          </a:stretch>
+        </p:blipFill>
+        <p:spPr bwMode="auto">
+          <a:xfrm>
+            <a:off x="1295400" y="4422865"/>
+            <a:ext cx="762000" cy="737314"/>
+          </a:xfrm>
+          <a:prstGeom prst="rect">
+            <a:avLst/>
+          </a:prstGeom>
+          <a:noFill/>
+          <a:extLst>
+            <a:ext uri="{909E8E84-426E-40DD-AFC4-6F175D3DCCD1}">
+              <a14:hiddenFill xmlns:a14="http://schemas.microsoft.com/office/drawing/2010/main">
+                <a:solidFill>
+                  <a:srgbClr val="FFFFFF"/>
+                </a:solidFill>
+              </a14:hiddenFill>
+            </a:ext>
+          </a:extLst>
+        </p:spPr>
+      </p:pic>
+      <p:pic>
+        <p:nvPicPr>
+          <p:cNvPr id="1027" name="Picture 3" descr="C:\!DISK\116 WEBSITES AND DOMAINS\копия scaleup.cfe.ru project4346582_1699572913 moved to github\project4346582\images\tild6563-6461-4365-a538-346663373164__g20.png"/>
+          <p:cNvPicPr>
+            <a:picLocks noChangeAspect="1" noChangeArrowheads="1"/>
+          </p:cNvPicPr>
+          <p:nvPr/>
+        </p:nvPicPr>
+        <p:blipFill rotWithShape="1">
+          <a:blip r:embed="rId4" cstate="print">
+            <a:extLst>
+              <a:ext uri="{28A0092B-C50C-407E-A947-70E740481C1C}">
+                <a14:useLocalDpi xmlns:a14="http://schemas.microsoft.com/office/drawing/2010/main" val="0"/>
+              </a:ext>
+            </a:extLst>
+          </a:blip>
+          <a:srcRect r="64981"/>
+          <a:stretch/>
+        </p:blipFill>
+        <p:spPr bwMode="auto">
+          <a:xfrm>
+            <a:off x="1359689" y="6662988"/>
+            <a:ext cx="633421" cy="576178"/>
+          </a:xfrm>
+          <a:prstGeom prst="rect">
+            <a:avLst/>
+          </a:prstGeom>
+          <a:noFill/>
+          <a:extLst>
+            <a:ext uri="{909E8E84-426E-40DD-AFC4-6F175D3DCCD1}">
+              <a14:hiddenFill xmlns:a14="http://schemas.microsoft.com/office/drawing/2010/main">
+                <a:solidFill>
+                  <a:srgbClr val="FFFFFF"/>
+                </a:solidFill>
+              </a14:hiddenFill>
+            </a:ext>
+          </a:extLst>
+        </p:spPr>
+      </p:pic>
+      <p:sp>
+        <p:nvSpPr>
+          <p:cNvPr id="16" name="Прямоугольник 15"/>
+          <p:cNvSpPr/>
+          <p:nvPr/>
+        </p:nvSpPr>
+        <p:spPr>
+          <a:xfrm>
+            <a:off x="2444817" y="8610600"/>
+            <a:ext cx="3429000" cy="276999"/>
+          </a:xfrm>
+          <a:prstGeom prst="rect">
+            <a:avLst/>
+          </a:prstGeom>
+        </p:spPr>
+        <p:txBody>
+          <a:bodyPr>
+            <a:spAutoFit/>
+          </a:bodyPr>
+          <a:lstStyle/>
+          <a:p>
+            <a:r>
+              <a:rPr lang="en-US" sz="1200" b="1" dirty="0" smtClean="0"/>
+              <a:t>DYNAMIC EC IS LAUNCHED</a:t>
+            </a:r>
+            <a:endParaRPr lang="ru-RU" sz="1200" dirty="0"/>
+          </a:p>
+        </p:txBody>
+      </p:sp>
+      <p:sp>
+        <p:nvSpPr>
+          <p:cNvPr id="17" name="Прямоугольник 16"/>
+          <p:cNvSpPr/>
+          <p:nvPr/>
+        </p:nvSpPr>
+        <p:spPr>
+          <a:xfrm>
+            <a:off x="2444817" y="7772400"/>
+            <a:ext cx="3429000" cy="276999"/>
+          </a:xfrm>
+          <a:prstGeom prst="rect">
+            <a:avLst/>
+          </a:prstGeom>
+        </p:spPr>
+        <p:txBody>
+          <a:bodyPr>
+            <a:spAutoFit/>
+          </a:bodyPr>
+          <a:lstStyle/>
+          <a:p>
+            <a:r>
+              <a:rPr lang="en-US" sz="1200" b="1" dirty="0" smtClean="0"/>
+              <a:t>GEW IS LAUNCHED</a:t>
+            </a:r>
+            <a:endParaRPr lang="ru-RU" sz="1200" dirty="0"/>
+          </a:p>
+        </p:txBody>
+      </p:sp>
+      <p:sp>
+        <p:nvSpPr>
+          <p:cNvPr id="18" name="Прямоугольник 17"/>
+          <p:cNvSpPr/>
+          <p:nvPr/>
+        </p:nvSpPr>
+        <p:spPr>
+          <a:xfrm>
+            <a:off x="2419417" y="6756400"/>
+            <a:ext cx="3429000" cy="276999"/>
+          </a:xfrm>
+          <a:prstGeom prst="rect">
+            <a:avLst/>
+          </a:prstGeom>
+        </p:spPr>
+        <p:txBody>
+          <a:bodyPr>
+            <a:spAutoFit/>
+          </a:bodyPr>
+          <a:lstStyle/>
+          <a:p>
+            <a:r>
+              <a:rPr lang="en-US" sz="1200" b="1" dirty="0" smtClean="0"/>
+              <a:t>G20</a:t>
+            </a:r>
+            <a:endParaRPr lang="ru-RU" sz="1200" dirty="0"/>
+          </a:p>
+        </p:txBody>
+      </p:sp>
+      <p:sp>
+        <p:nvSpPr>
+          <p:cNvPr id="19" name="Прямоугольник 18"/>
+          <p:cNvSpPr/>
+          <p:nvPr/>
+        </p:nvSpPr>
+        <p:spPr>
+          <a:xfrm>
+            <a:off x="2514600" y="4653022"/>
+            <a:ext cx="3429000" cy="276999"/>
+          </a:xfrm>
+          <a:prstGeom prst="rect">
+            <a:avLst/>
+          </a:prstGeom>
+        </p:spPr>
+        <p:txBody>
+          <a:bodyPr>
+            <a:spAutoFit/>
+          </a:bodyPr>
+          <a:lstStyle/>
+          <a:p>
+            <a:r>
+              <a:rPr lang="en-US" sz="1200" b="1" dirty="0" smtClean="0"/>
+              <a:t>HUDDLE</a:t>
+            </a:r>
+            <a:endParaRPr lang="ru-RU" sz="1200" dirty="0"/>
+          </a:p>
+        </p:txBody>
+      </p:sp>
+      <p:sp>
+        <p:nvSpPr>
+          <p:cNvPr id="20" name="Прямоугольник 19"/>
+          <p:cNvSpPr/>
+          <p:nvPr/>
+        </p:nvSpPr>
+        <p:spPr>
+          <a:xfrm>
+            <a:off x="2489200" y="2652355"/>
+            <a:ext cx="3429000" cy="276999"/>
+          </a:xfrm>
+          <a:prstGeom prst="rect">
+            <a:avLst/>
+          </a:prstGeom>
+        </p:spPr>
+        <p:txBody>
+          <a:bodyPr>
+            <a:spAutoFit/>
+          </a:bodyPr>
+          <a:lstStyle/>
+          <a:p>
+            <a:r>
+              <a:rPr lang="en-US" sz="1200" b="1" dirty="0" smtClean="0"/>
+              <a:t>SCALEUP</a:t>
+            </a:r>
+            <a:endParaRPr lang="ru-RU" sz="1200" dirty="0"/>
+          </a:p>
+        </p:txBody>
+      </p:sp>
     </p:spTree>
     <p:extLst>
       <p:ext uri="{BB962C8B-B14F-4D97-AF65-F5344CB8AC3E}">
